--- a/Schools_ML_Track/camp_2026/slides/ML/ML16.pptx
+++ b/Schools_ML_Track/camp_2026/slides/ML/ML16.pptx
@@ -129,7 +129,7 @@
   <p:extLst>
     <p:ext uri="{521415D9-36F7-43E2-AB2F-B90AF26B5E84}">
       <p14:sectionLst xmlns:p14="http://schemas.microsoft.com/office/powerpoint/2010/main">
-        <p14:section name="Opening" id="{bd0408ae-f608-7484-36b4-21a98d820db1}">
+        <p14:section name="Opening" id="{41c8935c-77f2-1fee-4a96-364dc7b32263}">
           <p14:sldIdLst>
             <p14:sldId id="256"/>
             <p14:sldId id="257"/>
@@ -140,7 +140,7 @@
             <p14:sldId id="262"/>
           </p14:sldIdLst>
         </p14:section>
-        <p14:section name="Block A" id="{46ff7123-5cb2-1efc-f760-c16498845584}">
+        <p14:section name="Block A" id="{00696869-57d6-315d-1147-1070b78d7bc3}">
           <p14:sldIdLst>
             <p14:sldId id="263"/>
             <p14:sldId id="264"/>
@@ -151,15 +151,15 @@
             <p14:sldId id="270"/>
           </p14:sldIdLst>
         </p14:section>
-        <p14:section name="Break" id="{5e96097d-6aaf-ba8f-d98e-fa7fe092e250}">
+        <p14:section name="Break" id="{4ebb83a8-1588-b284-1dba-9d20c6c4f529}">
           <p14:sldIdLst>
             <p14:sldId id="267"/>
           </p14:sldIdLst>
         </p14:section>
-        <p14:section name="Block A" id="{5ff18fcf-8e68-d621-7617-9b8cc500f835}">
+        <p14:section name="Block A" id="{492d1a7c-6122-2b96-201d-8c71208ed864}">
           <p14:sldIdLst/>
         </p14:section>
-        <p14:section name="Block B" id="{1e737f8a-b43d-2840-3a35-1905957da864}">
+        <p14:section name="Block B" id="{a6abccf6-96a2-9744-5ff9-43184fc196d4}">
           <p14:sldIdLst>
             <p14:sldId id="271"/>
             <p14:sldId id="272"/>
@@ -168,7 +168,7 @@
             <p14:sldId id="275"/>
           </p14:sldIdLst>
         </p14:section>
-        <p14:section name="Make and close" id="{07fc0693-28e9-bf6f-a22a-3e31b0ca73f0}">
+        <p14:section name="Make and close" id="{71dd95ec-0ae9-3320-3d1e-51d8f550e7ce}">
           <p14:sldIdLst>
             <p14:sldId id="276"/>
             <p14:sldId id="277"/>

--- a/Schools_ML_Track/camp_2026/slides/ML/ML16.pptx
+++ b/Schools_ML_Track/camp_2026/slides/ML/ML16.pptx
@@ -129,7 +129,7 @@
   <p:extLst>
     <p:ext uri="{521415D9-36F7-43E2-AB2F-B90AF26B5E84}">
       <p14:sectionLst xmlns:p14="http://schemas.microsoft.com/office/powerpoint/2010/main">
-        <p14:section name="Opening" id="{41c8935c-77f2-1fee-4a96-364dc7b32263}">
+        <p14:section name="Opening" id="{71ec6e73-6985-cdf9-4fc0-d65ee14892b6}">
           <p14:sldIdLst>
             <p14:sldId id="256"/>
             <p14:sldId id="257"/>
@@ -140,7 +140,7 @@
             <p14:sldId id="262"/>
           </p14:sldIdLst>
         </p14:section>
-        <p14:section name="Block A" id="{00696869-57d6-315d-1147-1070b78d7bc3}">
+        <p14:section name="Block A" id="{77bb557f-7af4-d818-a4a9-213b90d8c9b7}">
           <p14:sldIdLst>
             <p14:sldId id="263"/>
             <p14:sldId id="264"/>
@@ -151,15 +151,15 @@
             <p14:sldId id="270"/>
           </p14:sldIdLst>
         </p14:section>
-        <p14:section name="Break" id="{4ebb83a8-1588-b284-1dba-9d20c6c4f529}">
+        <p14:section name="Break" id="{86bc05d6-f4c4-84cb-bb17-4368e38b4b2f}">
           <p14:sldIdLst>
             <p14:sldId id="267"/>
           </p14:sldIdLst>
         </p14:section>
-        <p14:section name="Block A" id="{492d1a7c-6122-2b96-201d-8c71208ed864}">
+        <p14:section name="Block A" id="{baf0cbe5-a9b5-e1fb-90a3-77df0b3307d5}">
           <p14:sldIdLst/>
         </p14:section>
-        <p14:section name="Block B" id="{a6abccf6-96a2-9744-5ff9-43184fc196d4}">
+        <p14:section name="Block B" id="{71a04f53-8ce6-191a-9ccb-0ed8a2e81855}">
           <p14:sldIdLst>
             <p14:sldId id="271"/>
             <p14:sldId id="272"/>
@@ -168,7 +168,7 @@
             <p14:sldId id="275"/>
           </p14:sldIdLst>
         </p14:section>
-        <p14:section name="Make and close" id="{71dd95ec-0ae9-3320-3d1e-51d8f550e7ce}">
+        <p14:section name="Make and close" id="{be25970c-6249-2441-8bee-12fb40ec1d54}">
           <p14:sldIdLst>
             <p14:sldId id="276"/>
             <p14:sldId id="277"/>
@@ -3290,7 +3290,24 @@
                 <a:ea typeface="Lato" pitchFamily="34" charset="-122"/>
                 <a:cs typeface="Lato" pitchFamily="34" charset="-120"/>
               </a:rPr>
-              <a:t>Predicting a category with a decision tree</a:t>
+              <a:t>Predicting a category</a:t>
+            </a:r>
+            <a:endParaRPr lang="en-US" sz="5600" dirty="0"/>
+          </a:p>
+          <a:p>
+            <a:pPr algn="l" indent="0" marL="0">
+              <a:buNone/>
+            </a:pPr>
+            <a:r>
+              <a:rPr lang="en-US" sz="5600" b="1" dirty="0">
+                <a:solidFill>
+                  <a:srgbClr val="FFFFFF"/>
+                </a:solidFill>
+                <a:latin typeface="Lato" pitchFamily="34" charset="0"/>
+                <a:ea typeface="Lato" pitchFamily="34" charset="-122"/>
+                <a:cs typeface="Lato" pitchFamily="34" charset="-120"/>
+              </a:rPr>
+              <a:t>with a decision tree</a:t>
             </a:r>
             <a:endParaRPr lang="en-US" sz="5600" dirty="0"/>
           </a:p>
@@ -4788,11 +4805,11 @@
         <p:spPr>
           <a:xfrm>
             <a:off x="640080" y="1645920"/>
-            <a:ext cx="10881360" cy="3344672"/>
+            <a:ext cx="10881360" cy="1693672"/>
           </a:xfrm>
           <a:prstGeom prst="roundRect">
             <a:avLst>
-              <a:gd name="adj" fmla="val 2187"/>
+              <a:gd name="adj" fmla="val 4319"/>
             </a:avLst>
           </a:prstGeom>
           <a:solidFill>
@@ -4810,7 +4827,7 @@
         <p:spPr>
           <a:xfrm>
             <a:off x="841248" y="1847088"/>
-            <a:ext cx="10479024" cy="2942336"/>
+            <a:ext cx="10479024" cy="1291336"/>
           </a:xfrm>
           <a:prstGeom prst="rect">
             <a:avLst/>
@@ -4824,12 +4841,12 @@
           <a:p>
             <a:pPr algn="l" indent="0" marL="0">
               <a:lnSpc>
-                <a:spcPts val="2860"/>
+                <a:spcPts val="2470"/>
               </a:lnSpc>
               <a:buNone/>
             </a:pPr>
             <a:r>
-              <a:rPr lang="en-US" sz="2200" dirty="0">
+              <a:rPr lang="en-US" sz="1900" dirty="0">
                 <a:solidFill>
                   <a:srgbClr val="FFFFFF"/>
                 </a:solidFill>
@@ -4839,17 +4856,17 @@
               </a:rPr>
               <a:t>lengths = iris.data[:, 2]</a:t>
             </a:r>
-            <a:endParaRPr lang="en-US" sz="2200" dirty="0"/>
+            <a:endParaRPr lang="en-US" sz="1900" dirty="0"/>
           </a:p>
           <a:p>
             <a:pPr algn="l" indent="0" marL="0">
               <a:lnSpc>
-                <a:spcPts val="2860"/>
+                <a:spcPts val="2470"/>
               </a:lnSpc>
               <a:buNone/>
             </a:pPr>
             <a:r>
-              <a:rPr lang="en-US" sz="2200" dirty="0">
+              <a:rPr lang="en-US" sz="1900" dirty="0">
                 <a:solidFill>
                   <a:srgbClr val="FFFFFF"/>
                 </a:solidFill>
@@ -4857,19 +4874,19 @@
                 <a:ea typeface="Courier New" pitchFamily="34" charset="-122"/>
                 <a:cs typeface="Courier New" pitchFamily="34" charset="-120"/>
               </a:rPr>
-              <a:t>guess = (</a:t>
-            </a:r>
-            <a:endParaRPr lang="en-US" sz="2200" dirty="0"/>
+              <a:t>guess = (lengths &gt;= 2.5).astype(int) + (lengths &gt;= 4.8).astype(int)</a:t>
+            </a:r>
+            <a:endParaRPr lang="en-US" sz="1900" dirty="0"/>
           </a:p>
           <a:p>
             <a:pPr algn="l" indent="0" marL="0">
               <a:lnSpc>
-                <a:spcPts val="2860"/>
+                <a:spcPts val="2470"/>
               </a:lnSpc>
               <a:buNone/>
             </a:pPr>
             <a:r>
-              <a:rPr lang="en-US" sz="2200" dirty="0">
+              <a:rPr lang="en-US" sz="1900" dirty="0">
                 <a:solidFill>
                   <a:srgbClr val="FFFFFF"/>
                 </a:solidFill>
@@ -4877,19 +4894,19 @@
                 <a:ea typeface="Courier New" pitchFamily="34" charset="-122"/>
                 <a:cs typeface="Courier New" pitchFamily="34" charset="-120"/>
               </a:rPr>
-              <a:t>    (lengths &gt;= 2.5)</a:t>
-            </a:r>
-            <a:endParaRPr lang="en-US" sz="2200" dirty="0"/>
+              <a:t>hand_acc = (guess == iris.target).mean()</a:t>
+            </a:r>
+            <a:endParaRPr lang="en-US" sz="1900" dirty="0"/>
           </a:p>
           <a:p>
             <a:pPr algn="l" indent="0" marL="0">
               <a:lnSpc>
-                <a:spcPts val="2860"/>
+                <a:spcPts val="2470"/>
               </a:lnSpc>
               <a:buNone/>
             </a:pPr>
             <a:r>
-              <a:rPr lang="en-US" sz="2200" dirty="0">
+              <a:rPr lang="en-US" sz="1900" dirty="0">
                 <a:solidFill>
                   <a:srgbClr val="FFFFFF"/>
                 </a:solidFill>
@@ -4897,89 +4914,9 @@
                 <a:ea typeface="Courier New" pitchFamily="34" charset="-122"/>
                 <a:cs typeface="Courier New" pitchFamily="34" charset="-120"/>
               </a:rPr>
-              <a:t>    .astype(int) + (lengths &gt;= 4.8)</a:t>
-            </a:r>
-            <a:endParaRPr lang="en-US" sz="2200" dirty="0"/>
-          </a:p>
-          <a:p>
-            <a:pPr algn="l" indent="0" marL="0">
-              <a:lnSpc>
-                <a:spcPts val="2860"/>
-              </a:lnSpc>
-              <a:buNone/>
-            </a:pPr>
-            <a:r>
-              <a:rPr lang="en-US" sz="2200" dirty="0">
-                <a:solidFill>
-                  <a:srgbClr val="FFFFFF"/>
-                </a:solidFill>
-                <a:latin typeface="Courier New" pitchFamily="34" charset="0"/>
-                <a:ea typeface="Courier New" pitchFamily="34" charset="-122"/>
-                <a:cs typeface="Courier New" pitchFamily="34" charset="-120"/>
-              </a:rPr>
-              <a:t>    .astype(int)</a:t>
-            </a:r>
-            <a:endParaRPr lang="en-US" sz="2200" dirty="0"/>
-          </a:p>
-          <a:p>
-            <a:pPr algn="l" indent="0" marL="0">
-              <a:lnSpc>
-                <a:spcPts val="2860"/>
-              </a:lnSpc>
-              <a:buNone/>
-            </a:pPr>
-            <a:r>
-              <a:rPr lang="en-US" sz="2200" dirty="0">
-                <a:solidFill>
-                  <a:srgbClr val="FFFFFF"/>
-                </a:solidFill>
-                <a:latin typeface="Courier New" pitchFamily="34" charset="0"/>
-                <a:ea typeface="Courier New" pitchFamily="34" charset="-122"/>
-                <a:cs typeface="Courier New" pitchFamily="34" charset="-120"/>
-              </a:rPr>
-              <a:t>)</a:t>
-            </a:r>
-            <a:endParaRPr lang="en-US" sz="2200" dirty="0"/>
-          </a:p>
-          <a:p>
-            <a:pPr algn="l" indent="0" marL="0">
-              <a:lnSpc>
-                <a:spcPts val="2860"/>
-              </a:lnSpc>
-              <a:buNone/>
-            </a:pPr>
-            <a:r>
-              <a:rPr lang="en-US" sz="2200" dirty="0">
-                <a:solidFill>
-                  <a:srgbClr val="FFFFFF"/>
-                </a:solidFill>
-                <a:latin typeface="Courier New" pitchFamily="34" charset="0"/>
-                <a:ea typeface="Courier New" pitchFamily="34" charset="-122"/>
-                <a:cs typeface="Courier New" pitchFamily="34" charset="-120"/>
-              </a:rPr>
-              <a:t>hand_acc = (guess == iris.target).mean()</a:t>
-            </a:r>
-            <a:endParaRPr lang="en-US" sz="2200" dirty="0"/>
-          </a:p>
-          <a:p>
-            <a:pPr algn="l" indent="0" marL="0">
-              <a:lnSpc>
-                <a:spcPts val="2860"/>
-              </a:lnSpc>
-              <a:buNone/>
-            </a:pPr>
-            <a:r>
-              <a:rPr lang="en-US" sz="2200" dirty="0">
-                <a:solidFill>
-                  <a:srgbClr val="FFFFFF"/>
-                </a:solidFill>
-                <a:latin typeface="Courier New" pitchFamily="34" charset="0"/>
-                <a:ea typeface="Courier New" pitchFamily="34" charset="-122"/>
-                <a:cs typeface="Courier New" pitchFamily="34" charset="-120"/>
-              </a:rPr>
               <a:t>print(round(hand_acc, 3))</a:t>
             </a:r>
-            <a:endParaRPr lang="en-US" sz="2200" dirty="0"/>
+            <a:endParaRPr lang="en-US" sz="1900" dirty="0"/>
           </a:p>
         </p:txBody>
       </p:sp>
@@ -4991,8 +4928,8 @@
         </p:nvSpPr>
         <p:spPr>
           <a:xfrm>
-            <a:off x="640080" y="5173472"/>
-            <a:ext cx="8046720" cy="1090168"/>
+            <a:off x="640080" y="3522472"/>
+            <a:ext cx="8046720" cy="2741168"/>
           </a:xfrm>
           <a:prstGeom prst="rect">
             <a:avLst/>
@@ -5006,7 +4943,7 @@
           <a:p>
             <a:pPr algn="l" indent="0" marL="0">
               <a:lnSpc>
-                <a:spcPts val="2400"/>
+                <a:spcPts val="3120"/>
               </a:lnSpc>
               <a:spcAft>
                 <a:spcPts val="1010"/>
@@ -5014,7 +4951,7 @@
               <a:buNone/>
             </a:pPr>
             <a:r>
-              <a:rPr lang="en-US" sz="2000" dirty="0">
+              <a:rPr lang="en-US" sz="2600" dirty="0">
                 <a:solidFill>
                   <a:srgbClr val="111111"/>
                 </a:solidFill>
@@ -5024,12 +4961,12 @@
               </a:rPr>
               <a:t>Predict whether your hand rule will score above or below the tree.</a:t>
             </a:r>
-            <a:endParaRPr lang="en-US" sz="2000" dirty="0"/>
+            <a:endParaRPr lang="en-US" sz="2600" dirty="0"/>
           </a:p>
           <a:p>
             <a:pPr algn="l" indent="0" marL="0">
               <a:lnSpc>
-                <a:spcPts val="2400"/>
+                <a:spcPts val="3120"/>
               </a:lnSpc>
               <a:spcAft>
                 <a:spcPts val="1010"/>
@@ -5037,7 +4974,7 @@
               <a:buNone/>
             </a:pPr>
             <a:r>
-              <a:rPr lang="en-US" sz="2000" dirty="0">
+              <a:rPr lang="en-US" sz="2600" dirty="0">
                 <a:solidFill>
                   <a:srgbClr val="111111"/>
                 </a:solidFill>
@@ -5047,7 +4984,7 @@
               </a:rPr>
               <a:t>Write your guess on paper before we run it.</a:t>
             </a:r>
-            <a:endParaRPr lang="en-US" sz="2000" dirty="0"/>
+            <a:endParaRPr lang="en-US" sz="2600" dirty="0"/>
           </a:p>
         </p:txBody>
       </p:sp>
@@ -5067,7 +5004,7 @@
         </p:blipFill>
         <p:spPr>
           <a:xfrm>
-            <a:off x="10241280" y="5175758"/>
+            <a:off x="10241280" y="5031486"/>
             <a:ext cx="1188720" cy="1046988"/>
           </a:xfrm>
           <a:prstGeom prst="rect">
@@ -6237,15 +6174,15 @@
           <a:p>
             <a:pPr algn="l" indent="0" marL="0">
               <a:lnSpc>
-                <a:spcPts val="3600"/>
+                <a:spcPts val="3360"/>
               </a:lnSpc>
               <a:spcAft>
-                <a:spcPts val="2520"/>
+                <a:spcPts val="2020"/>
               </a:spcAft>
               <a:buNone/>
             </a:pPr>
             <a:r>
-              <a:rPr lang="en-US" sz="3000" dirty="0">
+              <a:rPr lang="en-US" sz="2800" dirty="0">
                 <a:solidFill>
                   <a:srgbClr val="111111"/>
                 </a:solidFill>
@@ -6253,22 +6190,22 @@
                 <a:ea typeface="Lato" pitchFamily="34" charset="-122"/>
                 <a:cs typeface="Lato" pitchFamily="34" charset="-120"/>
               </a:rPr>
-              <a:t>Convert both accuracies to percentages. Name the target and one input. Explain why species code 2 is not twice species code 1.</a:t>
-            </a:r>
-            <a:endParaRPr lang="en-US" sz="3000" dirty="0"/>
+              <a:t>Convert both accuracies to percentages.</a:t>
+            </a:r>
+            <a:endParaRPr lang="en-US" sz="2800" dirty="0"/>
           </a:p>
           <a:p>
             <a:pPr algn="l" indent="0" marL="0">
               <a:lnSpc>
-                <a:spcPts val="3600"/>
+                <a:spcPts val="3360"/>
               </a:lnSpc>
               <a:spcAft>
-                <a:spcPts val="2520"/>
+                <a:spcPts val="2020"/>
               </a:spcAft>
               <a:buNone/>
             </a:pPr>
             <a:r>
-              <a:rPr lang="en-US" sz="3000" dirty="0">
+              <a:rPr lang="en-US" sz="2800" dirty="0">
                 <a:solidFill>
                   <a:srgbClr val="111111"/>
                 </a:solidFill>
@@ -6276,9 +6213,55 @@
                 <a:ea typeface="Lato" pitchFamily="34" charset="-122"/>
                 <a:cs typeface="Lato" pitchFamily="34" charset="-120"/>
               </a:rPr>
+              <a:t>Name the target and one input.</a:t>
+            </a:r>
+            <a:endParaRPr lang="en-US" sz="2800" dirty="0"/>
+          </a:p>
+          <a:p>
+            <a:pPr algn="l" indent="0" marL="0">
+              <a:lnSpc>
+                <a:spcPts val="3360"/>
+              </a:lnSpc>
+              <a:spcAft>
+                <a:spcPts val="2020"/>
+              </a:spcAft>
+              <a:buNone/>
+            </a:pPr>
+            <a:r>
+              <a:rPr lang="en-US" sz="2800" dirty="0">
+                <a:solidFill>
+                  <a:srgbClr val="111111"/>
+                </a:solidFill>
+                <a:latin typeface="Lato" pitchFamily="34" charset="0"/>
+                <a:ea typeface="Lato" pitchFamily="34" charset="-122"/>
+                <a:cs typeface="Lato" pitchFamily="34" charset="-120"/>
+              </a:rPr>
+              <a:t>Explain why species code 2 is not twice species code 1.</a:t>
+            </a:r>
+            <a:endParaRPr lang="en-US" sz="2800" dirty="0"/>
+          </a:p>
+          <a:p>
+            <a:pPr algn="l" indent="0" marL="0">
+              <a:lnSpc>
+                <a:spcPts val="3360"/>
+              </a:lnSpc>
+              <a:spcAft>
+                <a:spcPts val="2020"/>
+              </a:spcAft>
+              <a:buNone/>
+            </a:pPr>
+            <a:r>
+              <a:rPr lang="en-US" sz="2800" dirty="0">
+                <a:solidFill>
+                  <a:srgbClr val="111111"/>
+                </a:solidFill>
+                <a:latin typeface="Lato" pitchFamily="34" charset="0"/>
+                <a:ea typeface="Lato" pitchFamily="34" charset="-122"/>
+                <a:cs typeface="Lato" pitchFamily="34" charset="-120"/>
+              </a:rPr>
               <a:t>Save it as ML16. Write two sentences: what you changed and how you checked it.</a:t>
             </a:r>
-            <a:endParaRPr lang="en-US" sz="3000" dirty="0"/>
+            <a:endParaRPr lang="en-US" sz="2800" dirty="0"/>
           </a:p>
         </p:txBody>
       </p:sp>
